--- a/tv/tv.pptx
+++ b/tv/tv.pptx
@@ -112,13 +112,18 @@
       </a:defRPr>
     </a:lvl9pPr>
   </p:defaultTextStyle>
+  <p:extLst>
+    <p:ext uri="{EFAFB233-063F-42B5-8137-9DF3F51BA10A}">
+      <p15:sldGuideLst xmlns:p15="http://schemas.microsoft.com/office/powerpoint/2012/main"/>
+    </p:ext>
+  </p:extLst>
 </p:presentation>
 </file>
 
 <file path=ppt/revisionInfo.xml><?xml version="1.0" encoding="utf-8"?>
 <p1510:revInfo xmlns:a="http://schemas.openxmlformats.org/drawingml/2006/main" xmlns:r="http://schemas.openxmlformats.org/officeDocument/2006/relationships" xmlns:p1510="http://schemas.microsoft.com/office/powerpoint/2015/10/main">
   <p1510:revLst>
-    <p1510:client id="{79C81F2C-6C5D-43FC-975B-AB0E7060F46B}" v="35" dt="2023-10-01T17:58:10.946"/>
+    <p1510:client id="{79C81F2C-6C5D-43FC-975B-AB0E7060F46B}" v="42" dt="2023-10-02T17:32:20.968"/>
   </p1510:revLst>
 </p1510:revInfo>
 </file>
@@ -128,16 +133,24 @@
   <pc:docChgLst>
     <pc:chgData name="Rafael Barbosa" userId="e85c8a03f9c5b7e8" providerId="LiveId" clId="{79C81F2C-6C5D-43FC-975B-AB0E7060F46B}"/>
     <pc:docChg chg="undo custSel addSld delSld modSld sldOrd">
-      <pc:chgData name="Rafael Barbosa" userId="e85c8a03f9c5b7e8" providerId="LiveId" clId="{79C81F2C-6C5D-43FC-975B-AB0E7060F46B}" dt="2023-10-01T17:59:23.590" v="473" actId="20577"/>
+      <pc:chgData name="Rafael Barbosa" userId="e85c8a03f9c5b7e8" providerId="LiveId" clId="{79C81F2C-6C5D-43FC-975B-AB0E7060F46B}" dt="2023-10-02T17:32:20.968" v="671" actId="14826"/>
       <pc:docMkLst>
         <pc:docMk/>
       </pc:docMkLst>
       <pc:sldChg chg="addSp delSp modSp new mod setBg">
-        <pc:chgData name="Rafael Barbosa" userId="e85c8a03f9c5b7e8" providerId="LiveId" clId="{79C81F2C-6C5D-43FC-975B-AB0E7060F46B}" dt="2023-10-01T17:50:50.799" v="207" actId="1036"/>
+        <pc:chgData name="Rafael Barbosa" userId="e85c8a03f9c5b7e8" providerId="LiveId" clId="{79C81F2C-6C5D-43FC-975B-AB0E7060F46B}" dt="2023-10-02T17:32:20.968" v="671" actId="14826"/>
         <pc:sldMkLst>
           <pc:docMk/>
           <pc:sldMk cId="3942700413" sldId="256"/>
         </pc:sldMkLst>
+        <pc:spChg chg="add del mod">
+          <ac:chgData name="Rafael Barbosa" userId="e85c8a03f9c5b7e8" providerId="LiveId" clId="{79C81F2C-6C5D-43FC-975B-AB0E7060F46B}" dt="2023-10-02T17:32:06.432" v="617" actId="478"/>
+          <ac:spMkLst>
+            <pc:docMk/>
+            <pc:sldMk cId="3942700413" sldId="256"/>
+            <ac:spMk id="2" creationId="{1CB25DF7-C0AF-1A94-E645-87DA7FB13949}"/>
+          </ac:spMkLst>
+        </pc:spChg>
         <pc:spChg chg="del mod">
           <ac:chgData name="Rafael Barbosa" userId="e85c8a03f9c5b7e8" providerId="LiveId" clId="{79C81F2C-6C5D-43FC-975B-AB0E7060F46B}" dt="2023-10-01T17:40:31.705" v="3" actId="478"/>
           <ac:spMkLst>
@@ -147,7 +160,15 @@
           </ac:spMkLst>
         </pc:spChg>
         <pc:spChg chg="add mod">
-          <ac:chgData name="Rafael Barbosa" userId="e85c8a03f9c5b7e8" providerId="LiveId" clId="{79C81F2C-6C5D-43FC-975B-AB0E7060F46B}" dt="2023-10-01T17:45:45.103" v="79" actId="207"/>
+          <ac:chgData name="Rafael Barbosa" userId="e85c8a03f9c5b7e8" providerId="LiveId" clId="{79C81F2C-6C5D-43FC-975B-AB0E7060F46B}" dt="2023-10-02T17:32:12.919" v="665" actId="1035"/>
+          <ac:spMkLst>
+            <pc:docMk/>
+            <pc:sldMk cId="3942700413" sldId="256"/>
+            <ac:spMk id="4" creationId="{3B59A488-F83D-20F2-AA7D-05038F2E8832}"/>
+          </ac:spMkLst>
+        </pc:spChg>
+        <pc:spChg chg="add mod">
+          <ac:chgData name="Rafael Barbosa" userId="e85c8a03f9c5b7e8" providerId="LiveId" clId="{79C81F2C-6C5D-43FC-975B-AB0E7060F46B}" dt="2023-10-02T17:31:58.191" v="615" actId="20577"/>
           <ac:spMkLst>
             <pc:docMk/>
             <pc:sldMk cId="3942700413" sldId="256"/>
@@ -155,7 +176,7 @@
           </ac:spMkLst>
         </pc:spChg>
         <pc:spChg chg="add mod">
-          <ac:chgData name="Rafael Barbosa" userId="e85c8a03f9c5b7e8" providerId="LiveId" clId="{79C81F2C-6C5D-43FC-975B-AB0E7060F46B}" dt="2023-10-01T17:46:48.255" v="134" actId="1036"/>
+          <ac:chgData name="Rafael Barbosa" userId="e85c8a03f9c5b7e8" providerId="LiveId" clId="{79C81F2C-6C5D-43FC-975B-AB0E7060F46B}" dt="2023-10-02T17:32:15.614" v="670" actId="20577"/>
           <ac:spMkLst>
             <pc:docMk/>
             <pc:sldMk cId="3942700413" sldId="256"/>
@@ -163,15 +184,15 @@
           </ac:spMkLst>
         </pc:spChg>
         <pc:spChg chg="add mod">
-          <ac:chgData name="Rafael Barbosa" userId="e85c8a03f9c5b7e8" providerId="LiveId" clId="{79C81F2C-6C5D-43FC-975B-AB0E7060F46B}" dt="2023-10-01T17:46:19.141" v="106" actId="1035"/>
+          <ac:chgData name="Rafael Barbosa" userId="e85c8a03f9c5b7e8" providerId="LiveId" clId="{79C81F2C-6C5D-43FC-975B-AB0E7060F46B}" dt="2023-10-02T17:26:48.781" v="509" actId="20577"/>
           <ac:spMkLst>
             <pc:docMk/>
             <pc:sldMk cId="3942700413" sldId="256"/>
             <ac:spMk id="10" creationId="{E38E50B8-D905-70CF-6B50-E53D5106A3ED}"/>
           </ac:spMkLst>
         </pc:spChg>
-        <pc:spChg chg="add mod">
-          <ac:chgData name="Rafael Barbosa" userId="e85c8a03f9c5b7e8" providerId="LiveId" clId="{79C81F2C-6C5D-43FC-975B-AB0E7060F46B}" dt="2023-10-01T17:50:50.799" v="207" actId="1036"/>
+        <pc:spChg chg="add del mod">
+          <ac:chgData name="Rafael Barbosa" userId="e85c8a03f9c5b7e8" providerId="LiveId" clId="{79C81F2C-6C5D-43FC-975B-AB0E7060F46B}" dt="2023-10-02T17:28:12.560" v="548" actId="478"/>
           <ac:spMkLst>
             <pc:docMk/>
             <pc:sldMk cId="3942700413" sldId="256"/>
@@ -187,7 +208,7 @@
           </ac:picMkLst>
         </pc:picChg>
         <pc:picChg chg="add mod">
-          <ac:chgData name="Rafael Barbosa" userId="e85c8a03f9c5b7e8" providerId="LiveId" clId="{79C81F2C-6C5D-43FC-975B-AB0E7060F46B}" dt="2023-10-01T17:44:38.349" v="62" actId="1076"/>
+          <ac:chgData name="Rafael Barbosa" userId="e85c8a03f9c5b7e8" providerId="LiveId" clId="{79C81F2C-6C5D-43FC-975B-AB0E7060F46B}" dt="2023-10-02T17:32:20.968" v="671" actId="14826"/>
           <ac:picMkLst>
             <pc:docMk/>
             <pc:sldMk cId="3942700413" sldId="256"/>
@@ -601,6 +622,13 @@
           </ac:picMkLst>
         </pc:picChg>
       </pc:sldChg>
+      <pc:sldChg chg="add del setBg">
+        <pc:chgData name="Rafael Barbosa" userId="e85c8a03f9c5b7e8" providerId="LiveId" clId="{79C81F2C-6C5D-43FC-975B-AB0E7060F46B}" dt="2023-10-02T17:27:15.958" v="517"/>
+        <pc:sldMkLst>
+          <pc:docMk/>
+          <pc:sldMk cId="4232856678" sldId="265"/>
+        </pc:sldMkLst>
+      </pc:sldChg>
     </pc:docChg>
   </pc:docChgLst>
 </pc:chgInfo>
@@ -753,7 +781,7 @@
           <a:p>
             <a:fld id="{62D8797B-565C-4DD8-8473-12759594B014}" type="datetimeFigureOut">
               <a:rPr lang="pt-BR" smtClean="0"/>
-              <a:t>01/10/2023</a:t>
+              <a:t>02/10/2023</a:t>
             </a:fld>
             <a:endParaRPr lang="pt-BR"/>
           </a:p>
@@ -951,7 +979,7 @@
           <a:p>
             <a:fld id="{62D8797B-565C-4DD8-8473-12759594B014}" type="datetimeFigureOut">
               <a:rPr lang="pt-BR" smtClean="0"/>
-              <a:t>01/10/2023</a:t>
+              <a:t>02/10/2023</a:t>
             </a:fld>
             <a:endParaRPr lang="pt-BR"/>
           </a:p>
@@ -1159,7 +1187,7 @@
           <a:p>
             <a:fld id="{62D8797B-565C-4DD8-8473-12759594B014}" type="datetimeFigureOut">
               <a:rPr lang="pt-BR" smtClean="0"/>
-              <a:t>01/10/2023</a:t>
+              <a:t>02/10/2023</a:t>
             </a:fld>
             <a:endParaRPr lang="pt-BR"/>
           </a:p>
@@ -1357,7 +1385,7 @@
           <a:p>
             <a:fld id="{62D8797B-565C-4DD8-8473-12759594B014}" type="datetimeFigureOut">
               <a:rPr lang="pt-BR" smtClean="0"/>
-              <a:t>01/10/2023</a:t>
+              <a:t>02/10/2023</a:t>
             </a:fld>
             <a:endParaRPr lang="pt-BR"/>
           </a:p>
@@ -1632,7 +1660,7 @@
           <a:p>
             <a:fld id="{62D8797B-565C-4DD8-8473-12759594B014}" type="datetimeFigureOut">
               <a:rPr lang="pt-BR" smtClean="0"/>
-              <a:t>01/10/2023</a:t>
+              <a:t>02/10/2023</a:t>
             </a:fld>
             <a:endParaRPr lang="pt-BR"/>
           </a:p>
@@ -1897,7 +1925,7 @@
           <a:p>
             <a:fld id="{62D8797B-565C-4DD8-8473-12759594B014}" type="datetimeFigureOut">
               <a:rPr lang="pt-BR" smtClean="0"/>
-              <a:t>01/10/2023</a:t>
+              <a:t>02/10/2023</a:t>
             </a:fld>
             <a:endParaRPr lang="pt-BR"/>
           </a:p>
@@ -2309,7 +2337,7 @@
           <a:p>
             <a:fld id="{62D8797B-565C-4DD8-8473-12759594B014}" type="datetimeFigureOut">
               <a:rPr lang="pt-BR" smtClean="0"/>
-              <a:t>01/10/2023</a:t>
+              <a:t>02/10/2023</a:t>
             </a:fld>
             <a:endParaRPr lang="pt-BR"/>
           </a:p>
@@ -2450,7 +2478,7 @@
           <a:p>
             <a:fld id="{62D8797B-565C-4DD8-8473-12759594B014}" type="datetimeFigureOut">
               <a:rPr lang="pt-BR" smtClean="0"/>
-              <a:t>01/10/2023</a:t>
+              <a:t>02/10/2023</a:t>
             </a:fld>
             <a:endParaRPr lang="pt-BR"/>
           </a:p>
@@ -2563,7 +2591,7 @@
           <a:p>
             <a:fld id="{62D8797B-565C-4DD8-8473-12759594B014}" type="datetimeFigureOut">
               <a:rPr lang="pt-BR" smtClean="0"/>
-              <a:t>01/10/2023</a:t>
+              <a:t>02/10/2023</a:t>
             </a:fld>
             <a:endParaRPr lang="pt-BR"/>
           </a:p>
@@ -2874,7 +2902,7 @@
           <a:p>
             <a:fld id="{62D8797B-565C-4DD8-8473-12759594B014}" type="datetimeFigureOut">
               <a:rPr lang="pt-BR" smtClean="0"/>
-              <a:t>01/10/2023</a:t>
+              <a:t>02/10/2023</a:t>
             </a:fld>
             <a:endParaRPr lang="pt-BR"/>
           </a:p>
@@ -3162,7 +3190,7 @@
           <a:p>
             <a:fld id="{62D8797B-565C-4DD8-8473-12759594B014}" type="datetimeFigureOut">
               <a:rPr lang="pt-BR" smtClean="0"/>
-              <a:t>01/10/2023</a:t>
+              <a:t>02/10/2023</a:t>
             </a:fld>
             <a:endParaRPr lang="pt-BR"/>
           </a:p>
@@ -3403,7 +3431,7 @@
           <a:p>
             <a:fld id="{62D8797B-565C-4DD8-8473-12759594B014}" type="datetimeFigureOut">
               <a:rPr lang="pt-BR" smtClean="0"/>
-              <a:t>01/10/2023</a:t>
+              <a:t>02/10/2023</a:t>
             </a:fld>
             <a:endParaRPr lang="pt-BR"/>
           </a:p>
@@ -3855,7 +3883,7 @@
       </p:sp>
       <p:pic>
         <p:nvPicPr>
-          <p:cNvPr id="7" name="Imagem 6" descr="Pessoas com roupas coloridas&#10;&#10;Descrição gerada automaticamente com confiança média">
+          <p:cNvPr id="7" name="Imagem 6">
             <a:extLst>
               <a:ext uri="{FF2B5EF4-FFF2-40B4-BE49-F238E27FC236}">
                 <a16:creationId xmlns:a16="http://schemas.microsoft.com/office/drawing/2014/main" id="{A37E12C4-435B-3840-D611-7DB3A00C7109}"/>
@@ -3875,14 +3903,13 @@
               </a:ext>
             </a:extLst>
           </a:blip>
-          <a:stretch>
-            <a:fillRect/>
-          </a:stretch>
+          <a:srcRect/>
+          <a:stretch/>
         </p:blipFill>
         <p:spPr>
           <a:xfrm>
-            <a:off x="-2" y="967196"/>
-            <a:ext cx="6857999" cy="10257607"/>
+            <a:off x="-2" y="1295400"/>
+            <a:ext cx="6857998" cy="9601198"/>
           </a:xfrm>
           <a:prstGeom prst="rect">
             <a:avLst/>
@@ -3927,7 +3954,7 @@
                 <a:ea typeface="ADLaM Display" panose="020F0502020204030204" pitchFamily="2" charset="0"/>
                 <a:cs typeface="ADLaM Display" panose="020F0502020204030204" pitchFamily="2" charset="0"/>
               </a:rPr>
-              <a:t>THE BIG BANG THEORY</a:t>
+              <a:t>ERA UMA VEZ UMA ESTRELA</a:t>
             </a:r>
           </a:p>
         </p:txBody>
@@ -3970,7 +3997,7 @@
                 <a:ea typeface="ADLaM Display" panose="020F0502020204030204" pitchFamily="2" charset="0"/>
                 <a:cs typeface="ADLaM Display" panose="020F0502020204030204" pitchFamily="2" charset="0"/>
               </a:rPr>
-              <a:t>19h40</a:t>
+              <a:t>08h30</a:t>
             </a:r>
             <a:endParaRPr lang="pt-BR" sz="3200" dirty="0">
               <a:solidFill>
@@ -4022,17 +4049,17 @@
                 <a:ea typeface="ADLaM Display" panose="020F0502020204030204" pitchFamily="2" charset="0"/>
                 <a:cs typeface="ADLaM Display" panose="020F0502020204030204" pitchFamily="2" charset="0"/>
               </a:rPr>
-              <a:t>DUBLADO</a:t>
-            </a:r>
-          </a:p>
-        </p:txBody>
-      </p:sp>
-      <p:sp>
-        <p:nvSpPr>
-          <p:cNvPr id="11" name="CaixaDeTexto 10">
-            <a:extLst>
-              <a:ext uri="{FF2B5EF4-FFF2-40B4-BE49-F238E27FC236}">
-                <a16:creationId xmlns:a16="http://schemas.microsoft.com/office/drawing/2014/main" id="{90D7FDD1-2B8D-F8E0-9224-52C26BCF7D87}"/>
+              <a:t>LEGENDADO</a:t>
+            </a:r>
+          </a:p>
+        </p:txBody>
+      </p:sp>
+      <p:sp>
+        <p:nvSpPr>
+          <p:cNvPr id="4" name="CaixaDeTexto 3">
+            <a:extLst>
+              <a:ext uri="{FF2B5EF4-FFF2-40B4-BE49-F238E27FC236}">
+                <a16:creationId xmlns:a16="http://schemas.microsoft.com/office/drawing/2014/main" id="{3B59A488-F83D-20F2-AA7D-05038F2E8832}"/>
               </a:ext>
             </a:extLst>
           </p:cNvPr>
@@ -4041,7 +4068,7 @@
         </p:nvSpPr>
         <p:spPr>
           <a:xfrm>
-            <a:off x="6256422" y="11666991"/>
+            <a:off x="6256425" y="11676544"/>
             <a:ext cx="601575" cy="523220"/>
           </a:xfrm>
           <a:prstGeom prst="rect">
